--- a/MODS/DeepslateDungeons/deepslate-dungeons.pptx
+++ b/MODS/DeepslateDungeons/deepslate-dungeons.pptx
@@ -3406,13 +3406,13 @@
               <p:nvPr>
                 <p:extLst>
                   <p:ext uri="{D42A27DB-BD31-4B8C-83A1-F6EECF244321}">
-                    <p14:modId xmlns:p14="http://schemas.microsoft.com/office/powerpoint/2010/main" val="3341176213"/>
+                    <p14:modId xmlns:p14="http://schemas.microsoft.com/office/powerpoint/2010/main" val="2427494255"/>
                   </p:ext>
                 </p:extLst>
               </p:nvPr>
             </p:nvGraphicFramePr>
             <p:xfrm>
-              <a:off x="3872971" y="1090224"/>
+              <a:off x="-408978" y="1533826"/>
               <a:ext cx="4677552" cy="4677552"/>
             </p:xfrm>
             <a:graphic>
@@ -3430,7 +3430,14 @@
                     <a:ln w="25400">
                       <a:noFill/>
                     </a:ln>
-                    <a:effectLst/>
+                    <a:effectLst>
+                      <a:glow rad="50800">
+                        <a:schemeClr val="bg1"/>
+                      </a:glow>
+                      <a:outerShdw dist="419100" dir="7800000" algn="ctr" rotWithShape="0">
+                        <a:prstClr val="black"/>
+                      </a:outerShdw>
+                    </a:effectLst>
                   </am3d:spPr>
                   <am3d:camera>
                     <am3d:pos x="206272" y="-1342235" z="69144138"/>
@@ -3508,7 +3515,7 @@
             </p:blipFill>
             <p:spPr>
               <a:xfrm>
-                <a:off x="3872971" y="1090224"/>
+                <a:off x="-408978" y="1533826"/>
                 <a:ext cx="4677552" cy="4677552"/>
               </a:xfrm>
               <a:prstGeom prst="rect">
@@ -3518,11 +3525,54 @@
               <a:ln w="25400">
                 <a:noFill/>
               </a:ln>
-              <a:effectLst/>
+              <a:effectLst>
+                <a:glow rad="50800">
+                  <a:schemeClr val="bg1"/>
+                </a:glow>
+                <a:outerShdw dist="419100" dir="7800000" algn="ctr" rotWithShape="0">
+                  <a:prstClr val="black"/>
+                </a:outerShdw>
+              </a:effectLst>
             </p:spPr>
           </p:pic>
         </mc:Fallback>
       </mc:AlternateContent>
+      <p:pic>
+        <p:nvPicPr>
+          <p:cNvPr id="4" name="Picture 3">
+            <a:extLst>
+              <a:ext uri="{FF2B5EF4-FFF2-40B4-BE49-F238E27FC236}">
+                <a16:creationId xmlns:a16="http://schemas.microsoft.com/office/drawing/2014/main" id="{CEEEC0C7-71C1-C476-598A-1BEB7CB2F713}"/>
+              </a:ext>
+            </a:extLst>
+          </p:cNvPr>
+          <p:cNvPicPr>
+            <a:picLocks noChangeAspect="1"/>
+          </p:cNvPicPr>
+          <p:nvPr/>
+        </p:nvPicPr>
+        <p:blipFill>
+          <a:blip r:embed="rId5">
+            <a:extLst>
+              <a:ext uri="{28A0092B-C50C-407E-A947-70E740481C1C}">
+                <a14:useLocalDpi xmlns:a14="http://schemas.microsoft.com/office/drawing/2010/main" val="0"/>
+              </a:ext>
+            </a:extLst>
+          </a:blip>
+          <a:stretch>
+            <a:fillRect/>
+          </a:stretch>
+        </p:blipFill>
+        <p:spPr>
+          <a:xfrm>
+            <a:off x="3654173" y="975336"/>
+            <a:ext cx="5115148" cy="4907328"/>
+          </a:xfrm>
+          <a:prstGeom prst="rect">
+            <a:avLst/>
+          </a:prstGeom>
+        </p:spPr>
+      </p:pic>
     </p:spTree>
     <p:extLst>
       <p:ext uri="{BB962C8B-B14F-4D97-AF65-F5344CB8AC3E}">
